--- a/01_FoundationProjects/MFL12_NeoPixel_Servo_Encoder/MFL12_NeoPixel_Servo_Encoder.pptx
+++ b/01_FoundationProjects/MFL12_NeoPixel_Servo_Encoder/MFL12_NeoPixel_Servo_Encoder.pptx
@@ -268,7 +268,7 @@
           <a:p>
             <a:fld id="{375049E3-AEF5-412D-9F98-5201579F9569}" type="datetimeFigureOut">
               <a:rPr lang="en-GB" smtClean="0"/>
-              <a:t>26/12/2025</a:t>
+              <a:t>18/01/2026</a:t>
             </a:fld>
             <a:endParaRPr lang="en-GB"/>
           </a:p>
@@ -468,7 +468,7 @@
           <a:p>
             <a:fld id="{375049E3-AEF5-412D-9F98-5201579F9569}" type="datetimeFigureOut">
               <a:rPr lang="en-GB" smtClean="0"/>
-              <a:t>26/12/2025</a:t>
+              <a:t>18/01/2026</a:t>
             </a:fld>
             <a:endParaRPr lang="en-GB"/>
           </a:p>
@@ -678,7 +678,7 @@
           <a:p>
             <a:fld id="{375049E3-AEF5-412D-9F98-5201579F9569}" type="datetimeFigureOut">
               <a:rPr lang="en-GB" smtClean="0"/>
-              <a:t>26/12/2025</a:t>
+              <a:t>18/01/2026</a:t>
             </a:fld>
             <a:endParaRPr lang="en-GB"/>
           </a:p>
@@ -878,7 +878,7 @@
           <a:p>
             <a:fld id="{375049E3-AEF5-412D-9F98-5201579F9569}" type="datetimeFigureOut">
               <a:rPr lang="en-GB" smtClean="0"/>
-              <a:t>26/12/2025</a:t>
+              <a:t>18/01/2026</a:t>
             </a:fld>
             <a:endParaRPr lang="en-GB"/>
           </a:p>
@@ -1154,7 +1154,7 @@
           <a:p>
             <a:fld id="{375049E3-AEF5-412D-9F98-5201579F9569}" type="datetimeFigureOut">
               <a:rPr lang="en-GB" smtClean="0"/>
-              <a:t>26/12/2025</a:t>
+              <a:t>18/01/2026</a:t>
             </a:fld>
             <a:endParaRPr lang="en-GB"/>
           </a:p>
@@ -1422,7 +1422,7 @@
           <a:p>
             <a:fld id="{375049E3-AEF5-412D-9F98-5201579F9569}" type="datetimeFigureOut">
               <a:rPr lang="en-GB" smtClean="0"/>
-              <a:t>26/12/2025</a:t>
+              <a:t>18/01/2026</a:t>
             </a:fld>
             <a:endParaRPr lang="en-GB"/>
           </a:p>
@@ -1837,7 +1837,7 @@
           <a:p>
             <a:fld id="{375049E3-AEF5-412D-9F98-5201579F9569}" type="datetimeFigureOut">
               <a:rPr lang="en-GB" smtClean="0"/>
-              <a:t>26/12/2025</a:t>
+              <a:t>18/01/2026</a:t>
             </a:fld>
             <a:endParaRPr lang="en-GB"/>
           </a:p>
@@ -1979,7 +1979,7 @@
           <a:p>
             <a:fld id="{375049E3-AEF5-412D-9F98-5201579F9569}" type="datetimeFigureOut">
               <a:rPr lang="en-GB" smtClean="0"/>
-              <a:t>26/12/2025</a:t>
+              <a:t>18/01/2026</a:t>
             </a:fld>
             <a:endParaRPr lang="en-GB"/>
           </a:p>
@@ -2092,7 +2092,7 @@
           <a:p>
             <a:fld id="{375049E3-AEF5-412D-9F98-5201579F9569}" type="datetimeFigureOut">
               <a:rPr lang="en-GB" smtClean="0"/>
-              <a:t>26/12/2025</a:t>
+              <a:t>18/01/2026</a:t>
             </a:fld>
             <a:endParaRPr lang="en-GB"/>
           </a:p>
@@ -2405,7 +2405,7 @@
           <a:p>
             <a:fld id="{375049E3-AEF5-412D-9F98-5201579F9569}" type="datetimeFigureOut">
               <a:rPr lang="en-GB" smtClean="0"/>
-              <a:t>26/12/2025</a:t>
+              <a:t>18/01/2026</a:t>
             </a:fld>
             <a:endParaRPr lang="en-GB"/>
           </a:p>
@@ -2694,7 +2694,7 @@
           <a:p>
             <a:fld id="{375049E3-AEF5-412D-9F98-5201579F9569}" type="datetimeFigureOut">
               <a:rPr lang="en-GB" smtClean="0"/>
-              <a:t>26/12/2025</a:t>
+              <a:t>18/01/2026</a:t>
             </a:fld>
             <a:endParaRPr lang="en-GB"/>
           </a:p>
@@ -2937,7 +2937,7 @@
           <a:p>
             <a:fld id="{375049E3-AEF5-412D-9F98-5201579F9569}" type="datetimeFigureOut">
               <a:rPr lang="en-GB" smtClean="0"/>
-              <a:t>26/12/2025</a:t>
+              <a:t>18/01/2026</a:t>
             </a:fld>
             <a:endParaRPr lang="en-GB"/>
           </a:p>
@@ -4741,7 +4741,7 @@
         <p:spPr>
           <a:xfrm>
             <a:off x="1039495" y="2622462"/>
-            <a:ext cx="4309253" cy="1477328"/>
+            <a:ext cx="4309253" cy="1754326"/>
           </a:xfrm>
           <a:prstGeom prst="rect">
             <a:avLst/>
@@ -4763,7 +4763,15 @@
             </a:r>
             <a:r>
               <a:rPr lang="sv-SE" b="1" dirty="0"/>
-              <a:t>(MFL12.ino)</a:t>
+              <a:t>(</a:t>
+            </a:r>
+            <a:r>
+              <a:rPr lang="en-GB" b="1" dirty="0"/>
+              <a:t>MFL12_NeoPixel</a:t>
+            </a:r>
+            <a:r>
+              <a:rPr lang="sv-SE" b="1" dirty="0"/>
+              <a:t>.ino)</a:t>
             </a:r>
           </a:p>
           <a:p>
@@ -4771,7 +4779,7 @@
               <a:rPr lang="en-GB" b="1" dirty="0">
                 <a:hlinkClick r:id="rId2"/>
               </a:rPr>
-              <a:t>https://github.com/info-zas/zas-robotics-motion/blob/main/01_FoundationProjects/MFL12/MFL12/MFL12.ino</a:t>
+              <a:t>https://github.com/info-zas/zas-robotics-motion/tree/main/01_FoundationProjects/MFL12_NeoPixel_Servo_Encoder/MFL12_NeoPixel</a:t>
             </a:r>
             <a:endParaRPr lang="en-GB" b="1" dirty="0"/>
           </a:p>
@@ -5065,7 +5073,7 @@
         <p:spPr>
           <a:xfrm>
             <a:off x="606099" y="1542997"/>
-            <a:ext cx="6093994" cy="646331"/>
+            <a:ext cx="6093994" cy="369332"/>
           </a:xfrm>
           <a:prstGeom prst="rect">
             <a:avLst/>
@@ -5080,64 +5088,8 @@
           <a:p>
             <a:r>
               <a:rPr lang="en-GB" sz="1800" b="1" dirty="0"/>
-              <a:t>Execute the same code (</a:t>
-            </a:r>
-            <a:r>
-              <a:rPr lang="sv-SE" b="1" dirty="0"/>
-              <a:t>MFL12.ino)</a:t>
-            </a:r>
-            <a:r>
-              <a:rPr lang="en-GB" sz="1800" b="1" dirty="0"/>
-              <a:t> in the motion creative board</a:t>
-            </a:r>
-          </a:p>
-        </p:txBody>
-      </p:sp>
-      <p:sp>
-        <p:nvSpPr>
-          <p:cNvPr id="4" name="TextBox 3">
-            <a:extLst>
-              <a:ext uri="{FF2B5EF4-FFF2-40B4-BE49-F238E27FC236}">
-                <a16:creationId xmlns:a16="http://schemas.microsoft.com/office/drawing/2014/main" id="{AC514551-EBEB-F0C1-E417-FCBD36193F47}"/>
-              </a:ext>
-            </a:extLst>
-          </p:cNvPr>
-          <p:cNvSpPr txBox="1"/>
-          <p:nvPr/>
-        </p:nvSpPr>
-        <p:spPr>
-          <a:xfrm>
-            <a:off x="514133" y="5072743"/>
-            <a:ext cx="4885191" cy="1200329"/>
-          </a:xfrm>
-          <a:prstGeom prst="rect">
-            <a:avLst/>
-          </a:prstGeom>
-          <a:noFill/>
-          <a:ln>
-            <a:solidFill>
-              <a:schemeClr val="accent1">
-                <a:lumMod val="75000"/>
-              </a:schemeClr>
-            </a:solidFill>
-          </a:ln>
-        </p:spPr>
-        <p:txBody>
-          <a:bodyPr wrap="square">
-            <a:spAutoFit/>
-          </a:bodyPr>
-          <a:lstStyle/>
-          <a:p>
-            <a:r>
-              <a:rPr lang="en-GB" dirty="0">
-                <a:hlinkClick r:id="rId3"/>
-              </a:rPr>
-              <a:t>https://github.com/info-zas/zas-robotics-motion/blob/main/01_FoundationProjects/MFL12/MFL12/MFL12.ino</a:t>
-            </a:r>
-            <a:endParaRPr lang="en-GB" dirty="0"/>
-          </a:p>
-          <a:p>
-            <a:endParaRPr lang="en-GB" dirty="0"/>
+              <a:t>Execute the same code in the motion creative board</a:t>
+            </a:r>
           </a:p>
         </p:txBody>
       </p:sp>
@@ -5195,41 +5147,6 @@
               <a:t>6</a:t>
             </a:fld>
             <a:endParaRPr lang="en-GB"/>
-          </a:p>
-        </p:txBody>
-      </p:sp>
-      <p:sp>
-        <p:nvSpPr>
-          <p:cNvPr id="10" name="TextBox 9">
-            <a:extLst>
-              <a:ext uri="{FF2B5EF4-FFF2-40B4-BE49-F238E27FC236}">
-                <a16:creationId xmlns:a16="http://schemas.microsoft.com/office/drawing/2014/main" id="{05088CD9-2199-A318-CF8A-5C0B1AD0DC26}"/>
-              </a:ext>
-            </a:extLst>
-          </p:cNvPr>
-          <p:cNvSpPr txBox="1"/>
-          <p:nvPr/>
-        </p:nvSpPr>
-        <p:spPr>
-          <a:xfrm>
-            <a:off x="402995" y="4761006"/>
-            <a:ext cx="2072191" cy="369332"/>
-          </a:xfrm>
-          <a:prstGeom prst="rect">
-            <a:avLst/>
-          </a:prstGeom>
-          <a:noFill/>
-        </p:spPr>
-        <p:txBody>
-          <a:bodyPr wrap="square">
-            <a:spAutoFit/>
-          </a:bodyPr>
-          <a:lstStyle/>
-          <a:p>
-            <a:r>
-              <a:rPr lang="en-GB" b="1" dirty="0"/>
-              <a:t>Code for Lab M2</a:t>
-            </a:r>
           </a:p>
         </p:txBody>
       </p:sp>
@@ -5248,7 +5165,7 @@
           <p:nvPr/>
         </p:nvPicPr>
         <p:blipFill>
-          <a:blip r:embed="rId4" cstate="print">
+          <a:blip r:embed="rId3" cstate="print">
             <a:extLst>
               <a:ext uri="{28A0092B-C50C-407E-A947-70E740481C1C}">
                 <a14:useLocalDpi xmlns:a14="http://schemas.microsoft.com/office/drawing/2010/main" val="0"/>
@@ -5310,6 +5227,68 @@
               <a:t> strip in J15.</a:t>
             </a:r>
             <a:endParaRPr lang="en-US" sz="2400" dirty="0"/>
+          </a:p>
+        </p:txBody>
+      </p:sp>
+      <p:sp>
+        <p:nvSpPr>
+          <p:cNvPr id="8" name="TextBox 7">
+            <a:extLst>
+              <a:ext uri="{FF2B5EF4-FFF2-40B4-BE49-F238E27FC236}">
+                <a16:creationId xmlns:a16="http://schemas.microsoft.com/office/drawing/2014/main" id="{A1444D9B-983E-195B-2A52-84EEF21F15AB}"/>
+              </a:ext>
+            </a:extLst>
+          </p:cNvPr>
+          <p:cNvSpPr txBox="1"/>
+          <p:nvPr/>
+        </p:nvSpPr>
+        <p:spPr>
+          <a:xfrm>
+            <a:off x="681281" y="4066272"/>
+            <a:ext cx="4309253" cy="1754326"/>
+          </a:xfrm>
+          <a:prstGeom prst="rect">
+            <a:avLst/>
+          </a:prstGeom>
+          <a:noFill/>
+          <a:ln>
+            <a:noFill/>
+          </a:ln>
+        </p:spPr>
+        <p:txBody>
+          <a:bodyPr wrap="square">
+            <a:spAutoFit/>
+          </a:bodyPr>
+          <a:lstStyle/>
+          <a:p>
+            <a:r>
+              <a:rPr lang="en-GB" b="1" dirty="0"/>
+              <a:t>Code for MFL12 </a:t>
+            </a:r>
+            <a:r>
+              <a:rPr lang="sv-SE" b="1" dirty="0"/>
+              <a:t>(</a:t>
+            </a:r>
+            <a:r>
+              <a:rPr lang="en-GB" b="1" dirty="0"/>
+              <a:t>MFL12_NeoPixel</a:t>
+            </a:r>
+            <a:r>
+              <a:rPr lang="sv-SE" b="1" dirty="0"/>
+              <a:t>.ino)</a:t>
+            </a:r>
+          </a:p>
+          <a:p>
+            <a:r>
+              <a:rPr lang="en-GB" b="1" dirty="0">
+                <a:hlinkClick r:id="rId4"/>
+              </a:rPr>
+              <a:t>https://github.com/info-zas/zas-robotics-motion/tree/main/01_FoundationProjects/MFL12_NeoPixel_Servo_Encoder/MFL12_NeoPixel</a:t>
+            </a:r>
+            <a:endParaRPr lang="en-GB" b="1" dirty="0"/>
+          </a:p>
+          <a:p>
+            <a:endParaRPr lang="en-GB" b="1" dirty="0"/>
           </a:p>
         </p:txBody>
       </p:sp>
@@ -5375,7 +5354,7 @@
                 <a:ea typeface="Calibri Light" panose="020F0302020204030204" pitchFamily="34" charset="0"/>
                 <a:cs typeface="Calibri Light" panose="020F0302020204030204" pitchFamily="34" charset="0"/>
               </a:rPr>
-              <a:t>MFL12_a : </a:t>
+              <a:t>MFL12 : </a:t>
             </a:r>
             <a:r>
               <a:rPr lang="en-US" b="1" dirty="0" err="1">
@@ -5590,7 +5569,7 @@
         <p:spPr>
           <a:xfrm>
             <a:off x="946355" y="2605088"/>
-            <a:ext cx="4309253" cy="1477328"/>
+            <a:ext cx="4309253" cy="2031325"/>
           </a:xfrm>
           <a:prstGeom prst="rect">
             <a:avLst/>
@@ -5614,7 +5593,15 @@
             </a:r>
             <a:r>
               <a:rPr lang="sv-SE" b="1" dirty="0"/>
-              <a:t>(MFL12_a.ino):</a:t>
+              <a:t>(</a:t>
+            </a:r>
+            <a:r>
+              <a:rPr lang="en-GB" b="1" dirty="0"/>
+              <a:t>MFL12_NeoPixel_Servo_Encoder</a:t>
+            </a:r>
+            <a:r>
+              <a:rPr lang="sv-SE" b="1" dirty="0"/>
+              <a:t>.ino):</a:t>
             </a:r>
           </a:p>
           <a:p>
@@ -5622,7 +5609,7 @@
               <a:rPr lang="en-GB" b="1" dirty="0">
                 <a:hlinkClick r:id="rId2"/>
               </a:rPr>
-              <a:t>https://github.com/info-zas/zas-robotics-motion/blob/main/01_FoundationProjects/MFL12/MFL12_a/MFL12_a.ino</a:t>
+              <a:t>https://github.com/info-zas/zas-robotics-motion/tree/main/01_FoundationProjects/MFL12_NeoPixel_Servo_Encoder/MFL12_NeoPixel_Servo_Encoder</a:t>
             </a:r>
             <a:endParaRPr lang="en-GB" b="1" dirty="0"/>
           </a:p>
